--- a/slides/slide-09.pptx
+++ b/slides/slide-09.pptx
@@ -4481,8 +4481,8 @@
         </p:nvSpPr>
         <p:spPr>
           <a:xfrm xmlns:a="http://schemas.openxmlformats.org/drawingml/2006/main">
-            <a:off x="609480" y="495360"/>
-            <a:ext cx="10858320" cy="637920"/>
+            <a:off x="609600" y="609600"/>
+            <a:ext cx="10972800" cy="685800"/>
           </a:xfrm>
           <a:prstGeom xmlns:a="http://schemas.openxmlformats.org/drawingml/2006/main" prst="rect">
             <a:avLst/>
@@ -4503,8 +4503,8 @@
             <a:noAutofit/>
           </a:bodyPr>
           <a:lstStyle xmlns:a="http://schemas.openxmlformats.org/drawingml/2006/main">
-            <a:defPPr>
-              <a:defRPr>
+            <a:defPPr algn="l">
+              <a:defRPr sz="3300">
                 <a:solidFill>
                   <a:srgbClr val="F7F7F2"/>
                 </a:solidFill>
@@ -4513,9 +4513,9 @@
                 <a:cs typeface="HarmonyOS Sans SC"/>
               </a:defRPr>
             </a:defPPr>
-            <a:lvl1pPr>
-              <a:buNone/>
-              <a:defRPr>
+            <a:lvl1pPr algn="l">
+              <a:buNone/>
+              <a:defRPr sz="3300">
                 <a:solidFill>
                   <a:srgbClr val="F7F7F2"/>
                 </a:solidFill>
@@ -4524,9 +4524,9 @@
                 <a:cs typeface="HarmonyOS Sans SC"/>
               </a:defRPr>
             </a:lvl1pPr>
-            <a:lvl2pPr>
-              <a:buNone/>
-              <a:defRPr>
+            <a:lvl2pPr algn="l">
+              <a:buNone/>
+              <a:defRPr sz="3300">
                 <a:solidFill>
                   <a:srgbClr val="F7F7F2"/>
                 </a:solidFill>
@@ -4535,9 +4535,9 @@
                 <a:cs typeface="HarmonyOS Sans SC"/>
               </a:defRPr>
             </a:lvl2pPr>
-            <a:lvl3pPr>
-              <a:buNone/>
-              <a:defRPr>
+            <a:lvl3pPr algn="l">
+              <a:buNone/>
+              <a:defRPr sz="3300">
                 <a:solidFill>
                   <a:srgbClr val="F7F7F2"/>
                 </a:solidFill>
@@ -4546,9 +4546,9 @@
                 <a:cs typeface="HarmonyOS Sans SC"/>
               </a:defRPr>
             </a:lvl3pPr>
-            <a:lvl4pPr>
-              <a:buNone/>
-              <a:defRPr>
+            <a:lvl4pPr algn="l">
+              <a:buNone/>
+              <a:defRPr sz="3300">
                 <a:solidFill>
                   <a:srgbClr val="F7F7F2"/>
                 </a:solidFill>
@@ -4557,9 +4557,9 @@
                 <a:cs typeface="HarmonyOS Sans SC"/>
               </a:defRPr>
             </a:lvl4pPr>
-            <a:lvl5pPr>
-              <a:buNone/>
-              <a:defRPr>
+            <a:lvl5pPr algn="l">
+              <a:buNone/>
+              <a:defRPr sz="3300">
                 <a:solidFill>
                   <a:srgbClr val="F7F7F2"/>
                 </a:solidFill>
@@ -4568,9 +4568,9 @@
                 <a:cs typeface="HarmonyOS Sans SC"/>
               </a:defRPr>
             </a:lvl5pPr>
-            <a:lvl6pPr>
-              <a:buNone/>
-              <a:defRPr>
+            <a:lvl6pPr algn="l">
+              <a:buNone/>
+              <a:defRPr sz="3300">
                 <a:solidFill>
                   <a:srgbClr val="F7F7F2"/>
                 </a:solidFill>
@@ -4579,9 +4579,9 @@
                 <a:cs typeface="HarmonyOS Sans SC"/>
               </a:defRPr>
             </a:lvl6pPr>
-            <a:lvl7pPr>
-              <a:buNone/>
-              <a:defRPr>
+            <a:lvl7pPr algn="l">
+              <a:buNone/>
+              <a:defRPr sz="3300">
                 <a:solidFill>
                   <a:srgbClr val="F7F7F2"/>
                 </a:solidFill>
@@ -4590,9 +4590,9 @@
                 <a:cs typeface="HarmonyOS Sans SC"/>
               </a:defRPr>
             </a:lvl7pPr>
-            <a:lvl8pPr>
-              <a:buNone/>
-              <a:defRPr>
+            <a:lvl8pPr algn="l">
+              <a:buNone/>
+              <a:defRPr sz="3300">
                 <a:solidFill>
                   <a:srgbClr val="F7F7F2"/>
                 </a:solidFill>
@@ -4601,9 +4601,9 @@
                 <a:cs typeface="HarmonyOS Sans SC"/>
               </a:defRPr>
             </a:lvl8pPr>
-            <a:lvl9pPr>
-              <a:buNone/>
-              <a:defRPr>
+            <a:lvl9pPr algn="l">
+              <a:buNone/>
+              <a:defRPr sz="3300">
                 <a:solidFill>
                   <a:srgbClr val="F7F7F2"/>
                 </a:solidFill>
@@ -4614,12 +4614,12 @@
             </a:lvl9pPr>
           </a:lstStyle>
           <a:p xmlns:a="http://schemas.openxmlformats.org/drawingml/2006/main">
-            <a:pPr>
+            <a:pPr algn="l">
               <a:lnSpc>
                 <a:spcPct val="116000"/>
               </a:lnSpc>
               <a:buNone/>
-              <a:defRPr>
+              <a:defRPr sz="3300">
                 <a:solidFill>
                   <a:srgbClr val="F7F7F2"/>
                 </a:solidFill>
@@ -4629,7 +4629,7 @@
               </a:defRPr>
             </a:pPr>
             <a:r>
-              <a:rPr sz="3450" b="1" u="none" strike="noStrike">
+              <a:rPr sz="3300" b="1" u="none" strike="noStrike">
                 <a:solidFill>
                   <a:srgbClr val="F7F7F2"/>
                 </a:solidFill>
@@ -4640,7 +4640,7 @@
               <a:t>203 </a:t>
             </a:r>
             <a:r>
-              <a:rPr sz="3450" b="1" u="none" strike="noStrike">
+              <a:rPr sz="3300" b="1" u="none" strike="noStrike">
                 <a:solidFill>
                   <a:srgbClr val="F7F7F2"/>
                 </a:solidFill>
@@ -4681,8 +4681,8 @@
         </p:blipFill>
         <p:spPr>
           <a:xfrm xmlns:a="http://schemas.openxmlformats.org/drawingml/2006/main">
-            <a:off x="923760" y="1467000"/>
-            <a:ext cx="3428640" cy="3428640"/>
+            <a:off x="609600" y="1752600"/>
+            <a:ext cx="3505200" cy="3505200"/>
           </a:xfrm>
           <a:prstGeom xmlns:a="http://schemas.openxmlformats.org/drawingml/2006/main" prst="rect">
             <a:avLst/>
@@ -4712,8 +4712,8 @@
         </p:blipFill>
         <p:spPr>
           <a:xfrm xmlns:a="http://schemas.openxmlformats.org/drawingml/2006/main">
-            <a:off x="6286680" y="1467000"/>
-            <a:ext cx="3428640" cy="3428640"/>
+            <a:off x="6210300" y="1752600"/>
+            <a:ext cx="3505200" cy="3505200"/>
           </a:xfrm>
           <a:prstGeom xmlns:a="http://schemas.openxmlformats.org/drawingml/2006/main" prst="rect">
             <a:avLst/>
@@ -4739,8 +4739,8 @@
         </p:nvSpPr>
         <p:spPr>
           <a:xfrm xmlns:a="http://schemas.openxmlformats.org/drawingml/2006/main">
-            <a:off x="923760" y="5114880"/>
-            <a:ext cx="5095440" cy="409320"/>
+            <a:off x="609600" y="5486400"/>
+            <a:ext cx="5372100" cy="457200"/>
           </a:xfrm>
           <a:prstGeom xmlns:a="http://schemas.openxmlformats.org/drawingml/2006/main" prst="rect">
             <a:avLst/>
@@ -4761,8 +4761,8 @@
             <a:noAutofit/>
           </a:bodyPr>
           <a:lstStyle xmlns:a="http://schemas.openxmlformats.org/drawingml/2006/main">
-            <a:defPPr>
-              <a:defRPr>
+            <a:defPPr algn="l">
+              <a:defRPr sz="2100">
                 <a:solidFill>
                   <a:srgbClr val="F7F7F2"/>
                 </a:solidFill>
@@ -4771,9 +4771,9 @@
                 <a:cs typeface="HarmonyOS Sans SC"/>
               </a:defRPr>
             </a:defPPr>
-            <a:lvl1pPr>
-              <a:buNone/>
-              <a:defRPr>
+            <a:lvl1pPr algn="l">
+              <a:buNone/>
+              <a:defRPr sz="2100">
                 <a:solidFill>
                   <a:srgbClr val="F7F7F2"/>
                 </a:solidFill>
@@ -4782,9 +4782,9 @@
                 <a:cs typeface="HarmonyOS Sans SC"/>
               </a:defRPr>
             </a:lvl1pPr>
-            <a:lvl2pPr>
-              <a:buNone/>
-              <a:defRPr>
+            <a:lvl2pPr algn="l">
+              <a:buNone/>
+              <a:defRPr sz="2100">
                 <a:solidFill>
                   <a:srgbClr val="F7F7F2"/>
                 </a:solidFill>
@@ -4793,9 +4793,9 @@
                 <a:cs typeface="HarmonyOS Sans SC"/>
               </a:defRPr>
             </a:lvl2pPr>
-            <a:lvl3pPr>
-              <a:buNone/>
-              <a:defRPr>
+            <a:lvl3pPr algn="l">
+              <a:buNone/>
+              <a:defRPr sz="2100">
                 <a:solidFill>
                   <a:srgbClr val="F7F7F2"/>
                 </a:solidFill>
@@ -4804,9 +4804,9 @@
                 <a:cs typeface="HarmonyOS Sans SC"/>
               </a:defRPr>
             </a:lvl3pPr>
-            <a:lvl4pPr>
-              <a:buNone/>
-              <a:defRPr>
+            <a:lvl4pPr algn="l">
+              <a:buNone/>
+              <a:defRPr sz="2100">
                 <a:solidFill>
                   <a:srgbClr val="F7F7F2"/>
                 </a:solidFill>
@@ -4815,9 +4815,9 @@
                 <a:cs typeface="HarmonyOS Sans SC"/>
               </a:defRPr>
             </a:lvl4pPr>
-            <a:lvl5pPr>
-              <a:buNone/>
-              <a:defRPr>
+            <a:lvl5pPr algn="l">
+              <a:buNone/>
+              <a:defRPr sz="2100">
                 <a:solidFill>
                   <a:srgbClr val="F7F7F2"/>
                 </a:solidFill>
@@ -4826,9 +4826,9 @@
                 <a:cs typeface="HarmonyOS Sans SC"/>
               </a:defRPr>
             </a:lvl5pPr>
-            <a:lvl6pPr>
-              <a:buNone/>
-              <a:defRPr>
+            <a:lvl6pPr algn="l">
+              <a:buNone/>
+              <a:defRPr sz="2100">
                 <a:solidFill>
                   <a:srgbClr val="F7F7F2"/>
                 </a:solidFill>
@@ -4837,9 +4837,9 @@
                 <a:cs typeface="HarmonyOS Sans SC"/>
               </a:defRPr>
             </a:lvl6pPr>
-            <a:lvl7pPr>
-              <a:buNone/>
-              <a:defRPr>
+            <a:lvl7pPr algn="l">
+              <a:buNone/>
+              <a:defRPr sz="2100">
                 <a:solidFill>
                   <a:srgbClr val="F7F7F2"/>
                 </a:solidFill>
@@ -4848,9 +4848,9 @@
                 <a:cs typeface="HarmonyOS Sans SC"/>
               </a:defRPr>
             </a:lvl7pPr>
-            <a:lvl8pPr>
-              <a:buNone/>
-              <a:defRPr>
+            <a:lvl8pPr algn="l">
+              <a:buNone/>
+              <a:defRPr sz="2100">
                 <a:solidFill>
                   <a:srgbClr val="F7F7F2"/>
                 </a:solidFill>
@@ -4859,9 +4859,9 @@
                 <a:cs typeface="HarmonyOS Sans SC"/>
               </a:defRPr>
             </a:lvl8pPr>
-            <a:lvl9pPr>
-              <a:buNone/>
-              <a:defRPr>
+            <a:lvl9pPr algn="l">
+              <a:buNone/>
+              <a:defRPr sz="2100">
                 <a:solidFill>
                   <a:srgbClr val="F7F7F2"/>
                 </a:solidFill>
@@ -4872,12 +4872,12 @@
             </a:lvl9pPr>
           </a:lstStyle>
           <a:p xmlns:a="http://schemas.openxmlformats.org/drawingml/2006/main">
-            <a:pPr>
+            <a:pPr algn="l">
               <a:lnSpc>
                 <a:spcPct val="116000"/>
               </a:lnSpc>
               <a:buNone/>
-              <a:defRPr>
+              <a:defRPr sz="2100">
                 <a:solidFill>
                   <a:srgbClr val="F7F7F2"/>
                 </a:solidFill>
@@ -4887,7 +4887,7 @@
               </a:defRPr>
             </a:pPr>
             <a:r>
-              <a:rPr sz="2320" b="1" u="none" strike="noStrike">
+              <a:rPr sz="2100" b="1" u="none" strike="noStrike">
                 <a:solidFill>
                   <a:srgbClr val="F7F7F2"/>
                 </a:solidFill>
@@ -4924,8 +4924,8 @@
         </p:nvSpPr>
         <p:spPr>
           <a:xfrm xmlns:a="http://schemas.openxmlformats.org/drawingml/2006/main">
-            <a:off x="923760" y="5619600"/>
-            <a:ext cx="5095440" cy="342720"/>
+            <a:off x="609600" y="5943600"/>
+            <a:ext cx="5372100" cy="304800"/>
           </a:xfrm>
           <a:prstGeom xmlns:a="http://schemas.openxmlformats.org/drawingml/2006/main" prst="rect">
             <a:avLst/>
@@ -4946,8 +4946,8 @@
             <a:noAutofit/>
           </a:bodyPr>
           <a:lstStyle xmlns:a="http://schemas.openxmlformats.org/drawingml/2006/main">
-            <a:defPPr>
-              <a:defRPr>
+            <a:defPPr algn="l">
+              <a:defRPr sz="1650">
                 <a:solidFill>
                   <a:srgbClr val="A6A7B2"/>
                 </a:solidFill>
@@ -4956,9 +4956,9 @@
                 <a:cs typeface="HarmonyOS Sans SC"/>
               </a:defRPr>
             </a:defPPr>
-            <a:lvl1pPr>
-              <a:buNone/>
-              <a:defRPr>
+            <a:lvl1pPr algn="l">
+              <a:buNone/>
+              <a:defRPr sz="1650">
                 <a:solidFill>
                   <a:srgbClr val="A6A7B2"/>
                 </a:solidFill>
@@ -4967,9 +4967,9 @@
                 <a:cs typeface="HarmonyOS Sans SC"/>
               </a:defRPr>
             </a:lvl1pPr>
-            <a:lvl2pPr>
-              <a:buNone/>
-              <a:defRPr>
+            <a:lvl2pPr algn="l">
+              <a:buNone/>
+              <a:defRPr sz="1650">
                 <a:solidFill>
                   <a:srgbClr val="A6A7B2"/>
                 </a:solidFill>
@@ -4978,9 +4978,9 @@
                 <a:cs typeface="HarmonyOS Sans SC"/>
               </a:defRPr>
             </a:lvl2pPr>
-            <a:lvl3pPr>
-              <a:buNone/>
-              <a:defRPr>
+            <a:lvl3pPr algn="l">
+              <a:buNone/>
+              <a:defRPr sz="1650">
                 <a:solidFill>
                   <a:srgbClr val="A6A7B2"/>
                 </a:solidFill>
@@ -4989,9 +4989,9 @@
                 <a:cs typeface="HarmonyOS Sans SC"/>
               </a:defRPr>
             </a:lvl3pPr>
-            <a:lvl4pPr>
-              <a:buNone/>
-              <a:defRPr>
+            <a:lvl4pPr algn="l">
+              <a:buNone/>
+              <a:defRPr sz="1650">
                 <a:solidFill>
                   <a:srgbClr val="A6A7B2"/>
                 </a:solidFill>
@@ -5000,9 +5000,9 @@
                 <a:cs typeface="HarmonyOS Sans SC"/>
               </a:defRPr>
             </a:lvl4pPr>
-            <a:lvl5pPr>
-              <a:buNone/>
-              <a:defRPr>
+            <a:lvl5pPr algn="l">
+              <a:buNone/>
+              <a:defRPr sz="1650">
                 <a:solidFill>
                   <a:srgbClr val="A6A7B2"/>
                 </a:solidFill>
@@ -5011,9 +5011,9 @@
                 <a:cs typeface="HarmonyOS Sans SC"/>
               </a:defRPr>
             </a:lvl5pPr>
-            <a:lvl6pPr>
-              <a:buNone/>
-              <a:defRPr>
+            <a:lvl6pPr algn="l">
+              <a:buNone/>
+              <a:defRPr sz="1650">
                 <a:solidFill>
                   <a:srgbClr val="A6A7B2"/>
                 </a:solidFill>
@@ -5022,9 +5022,9 @@
                 <a:cs typeface="HarmonyOS Sans SC"/>
               </a:defRPr>
             </a:lvl6pPr>
-            <a:lvl7pPr>
-              <a:buNone/>
-              <a:defRPr>
+            <a:lvl7pPr algn="l">
+              <a:buNone/>
+              <a:defRPr sz="1650">
                 <a:solidFill>
                   <a:srgbClr val="A6A7B2"/>
                 </a:solidFill>
@@ -5033,9 +5033,9 @@
                 <a:cs typeface="HarmonyOS Sans SC"/>
               </a:defRPr>
             </a:lvl7pPr>
-            <a:lvl8pPr>
-              <a:buNone/>
-              <a:defRPr>
+            <a:lvl8pPr algn="l">
+              <a:buNone/>
+              <a:defRPr sz="1650">
                 <a:solidFill>
                   <a:srgbClr val="A6A7B2"/>
                 </a:solidFill>
@@ -5044,9 +5044,9 @@
                 <a:cs typeface="HarmonyOS Sans SC"/>
               </a:defRPr>
             </a:lvl8pPr>
-            <a:lvl9pPr>
-              <a:buNone/>
-              <a:defRPr>
+            <a:lvl9pPr algn="l">
+              <a:buNone/>
+              <a:defRPr sz="1650">
                 <a:solidFill>
                   <a:srgbClr val="A6A7B2"/>
                 </a:solidFill>
@@ -5057,12 +5057,12 @@
             </a:lvl9pPr>
           </a:lstStyle>
           <a:p xmlns:a="http://schemas.openxmlformats.org/drawingml/2006/main">
-            <a:pPr>
+            <a:pPr algn="l">
               <a:lnSpc>
                 <a:spcPct val="116000"/>
               </a:lnSpc>
               <a:buNone/>
-              <a:defRPr>
+              <a:defRPr sz="1650">
                 <a:solidFill>
                   <a:srgbClr val="A6A7B2"/>
                 </a:solidFill>
@@ -5072,7 +5072,7 @@
               </a:defRPr>
             </a:pPr>
             <a:r>
-              <a:rPr sz="1870" b="0" u="none" strike="noStrike">
+              <a:rPr sz="1650" b="0" u="none" strike="noStrike">
                 <a:solidFill>
                   <a:srgbClr val="A6A7B2"/>
                 </a:solidFill>
@@ -5109,8 +5109,8 @@
         </p:nvSpPr>
         <p:spPr>
           <a:xfrm xmlns:a="http://schemas.openxmlformats.org/drawingml/2006/main">
-            <a:off x="6286680" y="5114880"/>
-            <a:ext cx="4762080" cy="409320"/>
+            <a:off x="6210300" y="5486400"/>
+            <a:ext cx="5372100" cy="457200"/>
           </a:xfrm>
           <a:prstGeom xmlns:a="http://schemas.openxmlformats.org/drawingml/2006/main" prst="rect">
             <a:avLst/>
@@ -5131,8 +5131,8 @@
             <a:noAutofit/>
           </a:bodyPr>
           <a:lstStyle xmlns:a="http://schemas.openxmlformats.org/drawingml/2006/main">
-            <a:defPPr>
-              <a:defRPr>
+            <a:defPPr algn="l">
+              <a:defRPr sz="2100">
                 <a:solidFill>
                   <a:srgbClr val="F7F7F2"/>
                 </a:solidFill>
@@ -5141,9 +5141,9 @@
                 <a:cs typeface="HarmonyOS Sans SC"/>
               </a:defRPr>
             </a:defPPr>
-            <a:lvl1pPr>
-              <a:buNone/>
-              <a:defRPr>
+            <a:lvl1pPr algn="l">
+              <a:buNone/>
+              <a:defRPr sz="2100">
                 <a:solidFill>
                   <a:srgbClr val="F7F7F2"/>
                 </a:solidFill>
@@ -5152,9 +5152,9 @@
                 <a:cs typeface="HarmonyOS Sans SC"/>
               </a:defRPr>
             </a:lvl1pPr>
-            <a:lvl2pPr>
-              <a:buNone/>
-              <a:defRPr>
+            <a:lvl2pPr algn="l">
+              <a:buNone/>
+              <a:defRPr sz="2100">
                 <a:solidFill>
                   <a:srgbClr val="F7F7F2"/>
                 </a:solidFill>
@@ -5163,9 +5163,9 @@
                 <a:cs typeface="HarmonyOS Sans SC"/>
               </a:defRPr>
             </a:lvl2pPr>
-            <a:lvl3pPr>
-              <a:buNone/>
-              <a:defRPr>
+            <a:lvl3pPr algn="l">
+              <a:buNone/>
+              <a:defRPr sz="2100">
                 <a:solidFill>
                   <a:srgbClr val="F7F7F2"/>
                 </a:solidFill>
@@ -5174,9 +5174,9 @@
                 <a:cs typeface="HarmonyOS Sans SC"/>
               </a:defRPr>
             </a:lvl3pPr>
-            <a:lvl4pPr>
-              <a:buNone/>
-              <a:defRPr>
+            <a:lvl4pPr algn="l">
+              <a:buNone/>
+              <a:defRPr sz="2100">
                 <a:solidFill>
                   <a:srgbClr val="F7F7F2"/>
                 </a:solidFill>
@@ -5185,9 +5185,9 @@
                 <a:cs typeface="HarmonyOS Sans SC"/>
               </a:defRPr>
             </a:lvl4pPr>
-            <a:lvl5pPr>
-              <a:buNone/>
-              <a:defRPr>
+            <a:lvl5pPr algn="l">
+              <a:buNone/>
+              <a:defRPr sz="2100">
                 <a:solidFill>
                   <a:srgbClr val="F7F7F2"/>
                 </a:solidFill>
@@ -5196,9 +5196,9 @@
                 <a:cs typeface="HarmonyOS Sans SC"/>
               </a:defRPr>
             </a:lvl5pPr>
-            <a:lvl6pPr>
-              <a:buNone/>
-              <a:defRPr>
+            <a:lvl6pPr algn="l">
+              <a:buNone/>
+              <a:defRPr sz="2100">
                 <a:solidFill>
                   <a:srgbClr val="F7F7F2"/>
                 </a:solidFill>
@@ -5207,9 +5207,9 @@
                 <a:cs typeface="HarmonyOS Sans SC"/>
               </a:defRPr>
             </a:lvl6pPr>
-            <a:lvl7pPr>
-              <a:buNone/>
-              <a:defRPr>
+            <a:lvl7pPr algn="l">
+              <a:buNone/>
+              <a:defRPr sz="2100">
                 <a:solidFill>
                   <a:srgbClr val="F7F7F2"/>
                 </a:solidFill>
@@ -5218,9 +5218,9 @@
                 <a:cs typeface="HarmonyOS Sans SC"/>
               </a:defRPr>
             </a:lvl7pPr>
-            <a:lvl8pPr>
-              <a:buNone/>
-              <a:defRPr>
+            <a:lvl8pPr algn="l">
+              <a:buNone/>
+              <a:defRPr sz="2100">
                 <a:solidFill>
                   <a:srgbClr val="F7F7F2"/>
                 </a:solidFill>
@@ -5229,9 +5229,9 @@
                 <a:cs typeface="HarmonyOS Sans SC"/>
               </a:defRPr>
             </a:lvl8pPr>
-            <a:lvl9pPr>
-              <a:buNone/>
-              <a:defRPr>
+            <a:lvl9pPr algn="l">
+              <a:buNone/>
+              <a:defRPr sz="2100">
                 <a:solidFill>
                   <a:srgbClr val="F7F7F2"/>
                 </a:solidFill>
@@ -5242,12 +5242,12 @@
             </a:lvl9pPr>
           </a:lstStyle>
           <a:p xmlns:a="http://schemas.openxmlformats.org/drawingml/2006/main">
-            <a:pPr>
+            <a:pPr algn="l">
               <a:lnSpc>
                 <a:spcPct val="116000"/>
               </a:lnSpc>
               <a:buNone/>
-              <a:defRPr>
+              <a:defRPr sz="2100">
                 <a:solidFill>
                   <a:srgbClr val="F7F7F2"/>
                 </a:solidFill>
@@ -5257,7 +5257,7 @@
               </a:defRPr>
             </a:pPr>
             <a:r>
-              <a:rPr sz="2320" b="1" u="none" strike="noStrike">
+              <a:rPr sz="2100" b="1" u="none" strike="noStrike">
                 <a:solidFill>
                   <a:srgbClr val="F7F7F2"/>
                 </a:solidFill>
@@ -5294,8 +5294,8 @@
         </p:nvSpPr>
         <p:spPr>
           <a:xfrm xmlns:a="http://schemas.openxmlformats.org/drawingml/2006/main">
-            <a:off x="6286680" y="5619600"/>
-            <a:ext cx="5095440" cy="342720"/>
+            <a:off x="6210300" y="5943600"/>
+            <a:ext cx="5372100" cy="304800"/>
           </a:xfrm>
           <a:prstGeom xmlns:a="http://schemas.openxmlformats.org/drawingml/2006/main" prst="rect">
             <a:avLst/>
@@ -5316,8 +5316,8 @@
             <a:noAutofit/>
           </a:bodyPr>
           <a:lstStyle xmlns:a="http://schemas.openxmlformats.org/drawingml/2006/main">
-            <a:defPPr>
-              <a:defRPr>
+            <a:defPPr algn="l">
+              <a:defRPr sz="1650">
                 <a:solidFill>
                   <a:srgbClr val="A6A7B2"/>
                 </a:solidFill>
@@ -5326,9 +5326,9 @@
                 <a:cs typeface="HarmonyOS Sans SC"/>
               </a:defRPr>
             </a:defPPr>
-            <a:lvl1pPr>
-              <a:buNone/>
-              <a:defRPr>
+            <a:lvl1pPr algn="l">
+              <a:buNone/>
+              <a:defRPr sz="1650">
                 <a:solidFill>
                   <a:srgbClr val="A6A7B2"/>
                 </a:solidFill>
@@ -5337,9 +5337,9 @@
                 <a:cs typeface="HarmonyOS Sans SC"/>
               </a:defRPr>
             </a:lvl1pPr>
-            <a:lvl2pPr>
-              <a:buNone/>
-              <a:defRPr>
+            <a:lvl2pPr algn="l">
+              <a:buNone/>
+              <a:defRPr sz="1650">
                 <a:solidFill>
                   <a:srgbClr val="A6A7B2"/>
                 </a:solidFill>
@@ -5348,9 +5348,9 @@
                 <a:cs typeface="HarmonyOS Sans SC"/>
               </a:defRPr>
             </a:lvl2pPr>
-            <a:lvl3pPr>
-              <a:buNone/>
-              <a:defRPr>
+            <a:lvl3pPr algn="l">
+              <a:buNone/>
+              <a:defRPr sz="1650">
                 <a:solidFill>
                   <a:srgbClr val="A6A7B2"/>
                 </a:solidFill>
@@ -5359,9 +5359,9 @@
                 <a:cs typeface="HarmonyOS Sans SC"/>
               </a:defRPr>
             </a:lvl3pPr>
-            <a:lvl4pPr>
-              <a:buNone/>
-              <a:defRPr>
+            <a:lvl4pPr algn="l">
+              <a:buNone/>
+              <a:defRPr sz="1650">
                 <a:solidFill>
                   <a:srgbClr val="A6A7B2"/>
                 </a:solidFill>
@@ -5370,9 +5370,9 @@
                 <a:cs typeface="HarmonyOS Sans SC"/>
               </a:defRPr>
             </a:lvl4pPr>
-            <a:lvl5pPr>
-              <a:buNone/>
-              <a:defRPr>
+            <a:lvl5pPr algn="l">
+              <a:buNone/>
+              <a:defRPr sz="1650">
                 <a:solidFill>
                   <a:srgbClr val="A6A7B2"/>
                 </a:solidFill>
@@ -5381,9 +5381,9 @@
                 <a:cs typeface="HarmonyOS Sans SC"/>
               </a:defRPr>
             </a:lvl5pPr>
-            <a:lvl6pPr>
-              <a:buNone/>
-              <a:defRPr>
+            <a:lvl6pPr algn="l">
+              <a:buNone/>
+              <a:defRPr sz="1650">
                 <a:solidFill>
                   <a:srgbClr val="A6A7B2"/>
                 </a:solidFill>
@@ -5392,9 +5392,9 @@
                 <a:cs typeface="HarmonyOS Sans SC"/>
               </a:defRPr>
             </a:lvl6pPr>
-            <a:lvl7pPr>
-              <a:buNone/>
-              <a:defRPr>
+            <a:lvl7pPr algn="l">
+              <a:buNone/>
+              <a:defRPr sz="1650">
                 <a:solidFill>
                   <a:srgbClr val="A6A7B2"/>
                 </a:solidFill>
@@ -5403,9 +5403,9 @@
                 <a:cs typeface="HarmonyOS Sans SC"/>
               </a:defRPr>
             </a:lvl7pPr>
-            <a:lvl8pPr>
-              <a:buNone/>
-              <a:defRPr>
+            <a:lvl8pPr algn="l">
+              <a:buNone/>
+              <a:defRPr sz="1650">
                 <a:solidFill>
                   <a:srgbClr val="A6A7B2"/>
                 </a:solidFill>
@@ -5414,9 +5414,9 @@
                 <a:cs typeface="HarmonyOS Sans SC"/>
               </a:defRPr>
             </a:lvl8pPr>
-            <a:lvl9pPr>
-              <a:buNone/>
-              <a:defRPr>
+            <a:lvl9pPr algn="l">
+              <a:buNone/>
+              <a:defRPr sz="1650">
                 <a:solidFill>
                   <a:srgbClr val="A6A7B2"/>
                 </a:solidFill>
@@ -5427,12 +5427,12 @@
             </a:lvl9pPr>
           </a:lstStyle>
           <a:p xmlns:a="http://schemas.openxmlformats.org/drawingml/2006/main">
-            <a:pPr>
+            <a:pPr algn="l">
               <a:lnSpc>
                 <a:spcPct val="116000"/>
               </a:lnSpc>
               <a:buNone/>
-              <a:defRPr>
+              <a:defRPr sz="1650">
                 <a:solidFill>
                   <a:srgbClr val="A6A7B2"/>
                 </a:solidFill>
@@ -5442,7 +5442,7 @@
               </a:defRPr>
             </a:pPr>
             <a:r>
-              <a:rPr sz="1870" b="0" u="none" strike="noStrike">
+              <a:rPr sz="1650" b="0" u="none" strike="noStrike">
                 <a:solidFill>
                   <a:srgbClr val="A6A7B2"/>
                 </a:solidFill>
@@ -5489,7 +5489,7 @@
         </p:blipFill>
         <p:spPr>
           <a:xfrm xmlns:a="http://schemas.openxmlformats.org/drawingml/2006/main">
-            <a:off x="609600" y="6524625"/>
+            <a:off x="609600" y="6400800"/>
             <a:ext cx="1952625" cy="228220"/>
           </a:xfrm>
           <a:prstGeom xmlns:a="http://schemas.openxmlformats.org/drawingml/2006/main" prst="rect">
@@ -5513,8 +5513,8 @@
         </p:nvSpPr>
         <p:spPr>
           <a:xfrm xmlns:a="http://schemas.openxmlformats.org/drawingml/2006/main">
-            <a:off x="11191875" y="6505575"/>
-            <a:ext cx="419100" cy="247650"/>
+            <a:off x="11163300" y="6400800"/>
+            <a:ext cx="419100" cy="228600"/>
           </a:xfrm>
           <a:prstGeom xmlns:a="http://schemas.openxmlformats.org/drawingml/2006/main" prst="rect">
             <a:avLst/>
@@ -5525,7 +5525,7 @@
           </a:ln>
         </p:spPr>
         <p:txBody>
-          <a:bodyPr xmlns:a="http://schemas.openxmlformats.org/drawingml/2006/main" wrap="none" lIns="0" tIns="0" rIns="0" bIns="0" anchor="ctr">
+          <a:bodyPr xmlns:a="http://schemas.openxmlformats.org/drawingml/2006/main" wrap="none" lIns="0" tIns="0" rIns="0" bIns="0" anchor="t">
             <a:noAutofit/>
           </a:bodyPr>
           <a:lstStyle xmlns:a="http://schemas.openxmlformats.org/drawingml/2006/main">
